--- a/ad24-1-presentation.pptx
+++ b/ad24-1-presentation.pptx
@@ -689,136 +689,6 @@
           <a:bodyPr/>
           <a:lstStyle/>
           <a:p>
-            <a:r>
-              <a:rPr lang="en-US" sz="1600" b="1" dirty="0"/>
-              <a:t>Angi</a:t>
-            </a:r>
-          </a:p>
-          <a:p>
-            <a:br>
-              <a:rPr lang="en-US" dirty="0"/>
-            </a:br>
-            <a:r>
-              <a:rPr lang="en-GB" dirty="0"/>
-              <a:t>"23 plays. My track has 23 plays. And I'm pretty sure fourteen of those are my mom."</a:t>
-            </a:r>
-          </a:p>
-          <a:p>
-            <a:r>
-              <a:rPr lang="en-GB" dirty="0"/>
-              <a:t>"I put three weeks into this. Mixed it twice. I think it genuinely sounds good. I shared the link, I posted it — nothing. It just sits there. And I don't even know what I'm doing wrong. Is it too slow? Not danceable enough? Wrong vibe? How do other songs just... blow up?"</a:t>
-            </a:r>
-          </a:p>
-          <a:p>
-            <a:r>
-              <a:rPr lang="en-GB" b="1" dirty="0"/>
-              <a:t>[Scrolling on phone/laptop, then something catches your eye:]</a:t>
-            </a:r>
-            <a:endParaRPr lang="en-GB" dirty="0"/>
-          </a:p>
-          <a:p>
-            <a:r>
-              <a:rPr lang="en-GB" dirty="0"/>
-              <a:t>"Okay wait —"</a:t>
-            </a:r>
-          </a:p>
-          <a:p>
-            <a:r>
-              <a:rPr lang="en-GB" i="1" dirty="0"/>
-              <a:t>"There are over 100 million songs on Spotify. Every day, tens of thousands more are uploaded. And yet, the vast majority of them exist in near-total silence."</a:t>
-            </a:r>
-            <a:endParaRPr lang="en-GB" dirty="0"/>
-          </a:p>
-          <a:p>
-            <a:r>
-              <a:rPr lang="en-GB" b="1" dirty="0"/>
-              <a:t>[Look up briefly:]</a:t>
-            </a:r>
-            <a:endParaRPr lang="en-GB" dirty="0"/>
-          </a:p>
-          <a:p>
-            <a:r>
-              <a:rPr lang="en-GB" dirty="0"/>
-              <a:t>"...yeah okay that's me. Let's see."</a:t>
-            </a:r>
-          </a:p>
-          <a:p>
-            <a:r>
-              <a:rPr lang="en-GB" b="1" dirty="0"/>
-              <a:t>§1</a:t>
-            </a:r>
-            <a:r>
-              <a:rPr lang="en-GB" dirty="0"/>
-              <a:t> — "10.5% of tracks have zero plays. Great, I'm in good company."</a:t>
-            </a:r>
-          </a:p>
-          <a:p>
-            <a:r>
-              <a:rPr lang="en-GB" b="1" dirty="0"/>
-              <a:t>§2</a:t>
-            </a:r>
-            <a:r>
-              <a:rPr lang="en-GB" dirty="0"/>
-              <a:t> — "None of the audio features really predict popularity... okay."</a:t>
-            </a:r>
-          </a:p>
-          <a:p>
-            <a:r>
-              <a:rPr lang="en-GB" b="1" dirty="0"/>
-              <a:t>§3</a:t>
-            </a:r>
-            <a:r>
-              <a:rPr lang="en-GB" dirty="0"/>
-              <a:t> — "Metal and classical are basically opposites, interesting."</a:t>
-            </a:r>
-          </a:p>
-          <a:p>
-            <a:r>
-              <a:rPr lang="en-GB" b="1" dirty="0"/>
-              <a:t>§4</a:t>
-            </a:r>
-            <a:r>
-              <a:rPr lang="en-GB" dirty="0"/>
-              <a:t> — "Hits are louder and more danceable on average... let me check my track."</a:t>
-            </a:r>
-          </a:p>
-          <a:p>
-            <a:r>
-              <a:rPr lang="en-GB" b="1" dirty="0"/>
-              <a:t>§5</a:t>
-            </a:r>
-            <a:r>
-              <a:rPr lang="en-GB" dirty="0"/>
-              <a:t> — "Every genre on a mood map. I'm probably somewhere sad and calm."</a:t>
-            </a:r>
-          </a:p>
-          <a:p>
-            <a:r>
-              <a:rPr lang="en-GB" i="1" dirty="0"/>
-              <a:t>Land on the slider:</a:t>
-            </a:r>
-            <a:endParaRPr lang="en-GB" dirty="0"/>
-          </a:p>
-          <a:p>
-            <a:r>
-              <a:rPr lang="en-GB" dirty="0"/>
-              <a:t>"And here you can put in your own stats and see how you score."</a:t>
-            </a:r>
-          </a:p>
-          <a:p>
-            <a:r>
-              <a:rPr lang="en-GB" b="1" dirty="0"/>
-              <a:t>[Look up at the audience. Break character just slightly — not fully, just enough to bring them in:]</a:t>
-            </a:r>
-            <a:endParaRPr lang="en-GB" dirty="0"/>
-          </a:p>
-          <a:p>
-            <a:r>
-              <a:rPr lang="en-GB" dirty="0"/>
-              <a:t>"...I need a second because I want to actually do this properly. Let us first show you how we built the thing, and then we're coming back to this."</a:t>
-            </a:r>
-          </a:p>
-          <a:p>
             <a:endParaRPr lang="en-US" dirty="0"/>
           </a:p>
         </p:txBody>
@@ -921,10 +791,6 @@
           <a:bodyPr/>
           <a:lstStyle/>
           <a:p>
-            <a:r>
-              <a:rPr lang="en-GB" dirty="0"/>
-              <a:t>"Section four is a direct comparison — hits versus non-hits across several feature averages. Grouped bar chart, simple as that. It puts both groups side by side and the differences are immediately visible."</a:t>
-            </a:r>
             <a:endParaRPr lang="en-US" dirty="0"/>
           </a:p>
         </p:txBody>
@@ -1033,10 +899,6 @@
           <a:bodyPr/>
           <a:lstStyle/>
           <a:p>
-            <a:r>
-              <a:rPr lang="en-GB" dirty="0"/>
-              <a:t>"The mood map is two continuous axes — valence and energy — with every genre as a dot. Scatterplot, because the position of each dot directly encodes its emotional identity. That spatial reading is what makes the map work."</a:t>
-            </a:r>
             <a:endParaRPr lang="en-US" dirty="0"/>
           </a:p>
         </p:txBody>
@@ -1126,58 +988,6 @@
         <p:txBody>
           <a:bodyPr/>
           <a:lstStyle/>
-          <a:p>
-            <a:r>
-              <a:rPr lang="en-GB" dirty="0"/>
-              <a:t>"The theory is clear: interactivity is not the same as animation. Every interactive element needs a reason — why does the user need to </a:t>
-            </a:r>
-            <a:r>
-              <a:rPr lang="en-GB" i="1" dirty="0"/>
-              <a:t>do</a:t>
-            </a:r>
-            <a:r>
-              <a:rPr lang="en-GB" dirty="0"/>
-              <a:t> something here instead of just reading?</a:t>
-            </a:r>
-          </a:p>
-          <a:p>
-            <a:r>
-              <a:rPr lang="en-GB" b="1" dirty="0"/>
-              <a:t>Filtering</a:t>
-            </a:r>
-            <a:r>
-              <a:rPr lang="en-GB" dirty="0"/>
-              <a:t> — the genre checkboxes. Six genres together create visual clutter. Filtering lets users isolate what they care about. Purpose: reduce noise.</a:t>
-            </a:r>
-          </a:p>
-          <a:p>
-            <a:r>
-              <a:rPr lang="en-GB" b="1" dirty="0"/>
-              <a:t>Participating</a:t>
-            </a:r>
-            <a:r>
-              <a:rPr lang="en-GB" dirty="0"/>
-              <a:t> — the slider. The user contributes their own data. Jonas's feature. Purpose: make it personal, make it memorable.</a:t>
-            </a:r>
-          </a:p>
-          <a:p>
-            <a:r>
-              <a:rPr lang="en-GB" b="1" dirty="0"/>
-              <a:t>Highlighting</a:t>
-            </a:r>
-            <a:r>
-              <a:rPr lang="en-GB" dirty="0"/>
-              <a:t> — hover tooltips on every chart. Exact values on demand, without </a:t>
-            </a:r>
-            <a:r>
-              <a:rPr lang="en-GB" dirty="0" err="1"/>
-              <a:t>labeling</a:t>
-            </a:r>
-            <a:r>
-              <a:rPr lang="en-GB" dirty="0"/>
-              <a:t> everything at all times. Purpose: serve both the reader who skims and the one who digs."</a:t>
-            </a:r>
-          </a:p>
           <a:p>
             <a:endParaRPr lang="en-US" dirty="0"/>
           </a:p>
@@ -1281,16 +1091,7 @@
           <a:bodyPr/>
           <a:lstStyle/>
           <a:p>
-            <a:r>
-              <a:rPr lang="en-GB" dirty="0"/>
-              <a:t>Three things worked well. The martini glass structure — users appreciated being guided through the story before getting the controls. Persona-driven language — no jargon complaints, the active titles landed. And the 'your track' slider was the most engaging section in every single test. Jonas was right.</a:t>
-            </a:r>
-          </a:p>
-          <a:p>
-            <a:r>
-              <a:rPr lang="en-GB" dirty="0"/>
-              <a:t>Three things we'd revisit: mobile layout, Bokeh wasn't built for small screens. The radar chart legend confused a few users — a short annotation would fix it. And the heatmap in section two was dense enough that some people just skipped it."</a:t>
-            </a:r>
+            <a:endParaRPr lang="en-GB" dirty="0"/>
           </a:p>
         </p:txBody>
       </p:sp>
@@ -1398,107 +1199,6 @@
           <a:bodyPr/>
           <a:lstStyle/>
           <a:p>
-            <a:r>
-              <a:rPr lang="en-GB" b="1" dirty="0"/>
-              <a:t>Angi</a:t>
-            </a:r>
-          </a:p>
-          <a:p>
-            <a:endParaRPr lang="en-GB" dirty="0"/>
-          </a:p>
-          <a:p>
-            <a:r>
-              <a:rPr lang="en-GB" dirty="0"/>
-              <a:t>"Okay. So now I actually understand what I'm looking at.</a:t>
-            </a:r>
-          </a:p>
-          <a:p>
-            <a:r>
-              <a:rPr lang="en-GB" dirty="0"/>
-              <a:t>Let me put in my track."</a:t>
-            </a:r>
-          </a:p>
-          <a:p>
-            <a:r>
-              <a:rPr lang="en-GB" b="1" dirty="0"/>
-              <a:t>[Drag the sliders one by one, saying each value out loud:]</a:t>
-            </a:r>
-            <a:endParaRPr lang="en-GB" dirty="0"/>
-          </a:p>
-          <a:p>
-            <a:r>
-              <a:rPr lang="en-GB" i="1" dirty="0"/>
-              <a:t>Fill in your real values — example pacing:</a:t>
-            </a:r>
-            <a:endParaRPr lang="en-GB" dirty="0"/>
-          </a:p>
-          <a:p>
-            <a:r>
-              <a:rPr lang="en-GB" dirty="0"/>
-              <a:t>"Danceability — it's pretty atmospheric, not really made to dance to... 0.35. Energy — moderate, not a banger, not ambient... 0.5. Valence — honestly it's kind of melancholic... 0.3. </a:t>
-            </a:r>
-            <a:r>
-              <a:rPr lang="en-GB" dirty="0" err="1"/>
-              <a:t>Acousticness</a:t>
-            </a:r>
-            <a:r>
-              <a:rPr lang="en-GB" dirty="0"/>
-              <a:t> — mostly produced, a bit of live stuff... 0.2. Tempo — around 95 BPM."</a:t>
-            </a:r>
-          </a:p>
-          <a:p>
-            <a:r>
-              <a:rPr lang="en-GB" b="1" dirty="0"/>
-              <a:t>[Read the result. Don't pre-script the reaction — let it be genuine.]</a:t>
-            </a:r>
-            <a:endParaRPr lang="en-GB" dirty="0"/>
-          </a:p>
-          <a:p>
-            <a:r>
-              <a:rPr lang="en-GB" dirty="0"/>
-              <a:t>"Average popularity of tracks like mine: [X] out of 100."</a:t>
-            </a:r>
-          </a:p>
-          <a:p>
-            <a:r>
-              <a:rPr lang="en-GB" b="1" dirty="0"/>
-              <a:t>[Whatever the number, make the point — high or low it works:]</a:t>
-            </a:r>
-            <a:endParaRPr lang="en-GB" dirty="0"/>
-          </a:p>
-          <a:p>
-            <a:r>
-              <a:rPr lang="en-GB" dirty="0"/>
-              <a:t>"Which — and this is the whole thesis — is an average, not a prediction. There are tracks exactly like mine with millions of streams. And there are tracks exactly like mine with 23 plays.</a:t>
-            </a:r>
-          </a:p>
-          <a:p>
-            <a:r>
-              <a:rPr lang="en-GB" dirty="0"/>
-              <a:t>The audio features barely explain it. The algorithm, the timing, the playlist placement — that's what actually drives it. And none of that is in a dataset."</a:t>
-            </a:r>
-          </a:p>
-          <a:p>
-            <a:r>
-              <a:rPr lang="en-GB" b="1" dirty="0"/>
-              <a:t>[Short beat. Then turn to the audience, genuinely curious:]</a:t>
-            </a:r>
-            <a:endParaRPr lang="en-GB" dirty="0"/>
-          </a:p>
-          <a:p>
-            <a:r>
-              <a:rPr lang="en-GB" dirty="0"/>
-              <a:t>Now do one of you have a song in mind that you want to try? Give us the scores and let’s see.</a:t>
-            </a:r>
-          </a:p>
-          <a:p>
-            <a:r>
-              <a:rPr lang="en-GB" b="1" dirty="0"/>
-              <a:t>[Take 1–2 inputs. Run the sliders. React briefly to each result. Keep each under a minute. Then close the laptop cleanly.]</a:t>
-            </a:r>
-            <a:endParaRPr lang="en-GB" dirty="0"/>
-          </a:p>
-          <a:p>
             <a:endParaRPr lang="en-US" dirty="0"/>
           </a:p>
         </p:txBody>
@@ -1588,18 +1288,6 @@
         <p:txBody>
           <a:bodyPr/>
           <a:lstStyle/>
-          <a:p>
-            <a:r>
-              <a:rPr lang="en-GB" dirty="0"/>
-              <a:t>"The design tells a consistent story — and theory made every choice defensible.</a:t>
-            </a:r>
-          </a:p>
-          <a:p>
-            <a:r>
-              <a:rPr lang="en-GB" dirty="0"/>
-              <a:t>The story is live at the link on screen. Thank you."</a:t>
-            </a:r>
-          </a:p>
           <a:p>
             <a:endParaRPr lang="en-US" dirty="0"/>
           </a:p>
@@ -1793,24 +1481,6 @@
           <a:bodyPr/>
           <a:lstStyle/>
           <a:p>
-            <a:r>
-              <a:rPr lang="en-GB" dirty="0"/>
-              <a:t>"So — that's the product. A scrollable, interactive data story, published on GitHub Pages, open to anyone. Not a dashboard, not a static report. A narrative experience.</a:t>
-            </a:r>
-          </a:p>
-          <a:p>
-            <a:r>
-              <a:rPr lang="en-GB" dirty="0"/>
-              <a:t>Six sections that build on each other: popularity distribution, audio features, genre profiles, hits versus non-hits, the mood map — and section six, the slider.</a:t>
-            </a:r>
-          </a:p>
-          <a:p>
-            <a:r>
-              <a:rPr lang="en-GB" dirty="0"/>
-              <a:t>Every single element was a deliberate design choice. Let's go through them."</a:t>
-            </a:r>
-          </a:p>
-          <a:p>
             <a:endParaRPr lang="en-US" dirty="0"/>
           </a:p>
         </p:txBody>
@@ -1894,30 +1564,6 @@
         <p:txBody>
           <a:bodyPr/>
           <a:lstStyle/>
-          <a:p>
-            <a:r>
-              <a:rPr lang="en-GB" dirty="0"/>
-              <a:t>"Before any design decision, we asked: who is this actually for?</a:t>
-            </a:r>
-          </a:p>
-          <a:p>
-            <a:r>
-              <a:rPr lang="en-GB" dirty="0"/>
-              <a:t>We built two personas. </a:t>
-            </a:r>
-          </a:p>
-          <a:p>
-            <a:r>
-              <a:rPr lang="en-GB" dirty="0"/>
-              <a:t>Lena is a communication design student. Daily Spotify listener, no data background, wants to understand why songs blow up. If we throw correlation coefficients at her, she's gone in thirty seconds.</a:t>
-            </a:r>
-          </a:p>
-          <a:p>
-            <a:r>
-              <a:rPr lang="en-GB" dirty="0"/>
-              <a:t>She drove one core constraint: plain language throughout, narrative framing instead of raw stats, section titles written as active insights rather than chart labels."</a:t>
-            </a:r>
-          </a:p>
           <a:p>
             <a:endParaRPr lang="en-US" dirty="0"/>
           </a:p>
@@ -2021,32 +1667,6 @@
           <a:bodyPr/>
           <a:lstStyle/>
           <a:p>
-            <a:r>
-              <a:rPr lang="en-GB" dirty="0"/>
-              <a:t>"Our second persona is Jonas — a bedroom producer who uploads to SoundCloud and Spotify. Curious about what makes songs popular, no data science background, personal stake in the question.</a:t>
-            </a:r>
-          </a:p>
-          <a:p>
-            <a:r>
-              <a:rPr lang="en-GB" dirty="0"/>
-              <a:t>Jonas is why the interactive slider in section six exists. The insight from building him was: this person doesn't just want to read about data. They want to know — what about </a:t>
-            </a:r>
-            <a:r>
-              <a:rPr lang="en-GB" i="1" dirty="0"/>
-              <a:t>my</a:t>
-            </a:r>
-            <a:r>
-              <a:rPr lang="en-GB" dirty="0"/>
-              <a:t> song?</a:t>
-            </a:r>
-          </a:p>
-          <a:p>
-            <a:r>
-              <a:rPr lang="en-GB" dirty="0"/>
-              <a:t>That one question drove the most complex feature in the whole project.</a:t>
-            </a:r>
-          </a:p>
-          <a:p>
             <a:endParaRPr lang="en-US" dirty="0"/>
           </a:p>
         </p:txBody>
@@ -2137,18 +1757,6 @@
           <a:bodyPr/>
           <a:lstStyle/>
           <a:p>
-            <a:r>
-              <a:rPr lang="en-GB" dirty="0"/>
-              <a:t>"Knowing our audience, we had to decide what to build. We went with an explanatory format — meaning we guide the reader through the insights rather than just dumping the data on them.</a:t>
-            </a:r>
-          </a:p>
-          <a:p>
-            <a:r>
-              <a:rPr lang="en-GB" dirty="0"/>
-              <a:t>But explanatory alone isn't enough to justify a full data story over a dashboard. The difference is narrative — a dashboard has the data and the visuals, but it has no narrator, no sequence, no reason to keep reading. A data story has all three. That's why we chose this format."</a:t>
-            </a:r>
-          </a:p>
-          <a:p>
             <a:endParaRPr lang="en-US" dirty="0"/>
           </a:p>
         </p:txBody>
@@ -2232,18 +1840,6 @@
         <p:txBody>
           <a:bodyPr/>
           <a:lstStyle/>
-          <a:p>
-            <a:r>
-              <a:rPr lang="en-GB" dirty="0"/>
-              <a:t>"We structured the story as a martini glass — you start author-driven, meaning we control the order and the arc through sections one to five. Then in section six, the slider, the reader takes over completely and explores with their own values.</a:t>
-            </a:r>
-          </a:p>
-          <a:p>
-            <a:r>
-              <a:rPr lang="en-GB" dirty="0"/>
-              <a:t>That shift from guided to free was a conscious decision. We wanted to build trust with the reader first before handing them the controls."</a:t>
-            </a:r>
-          </a:p>
           <a:p>
             <a:endParaRPr lang="en-US" dirty="0"/>
           </a:p>
@@ -2347,16 +1943,6 @@
           <a:bodyPr/>
           <a:lstStyle/>
           <a:p>
-            <a:r>
-              <a:rPr lang="en-GB" b="0" dirty="0"/>
-              <a:t>Each chart type has a reason for it’s usage</a:t>
-            </a:r>
-          </a:p>
-          <a:p>
-            <a:r>
-              <a:rPr lang="en-GB" dirty="0"/>
-              <a:t>"Section one has one variable: the popularity score. A histogram was the obvious choice because we needed to show the shape of the distribution — the skew, the spike at zero, the long tail. That shape is the whole point of the section."</a:t>
-            </a:r>
             <a:endParaRPr lang="en-US" dirty="0"/>
           </a:p>
         </p:txBody>
@@ -2465,10 +2051,6 @@
           <a:bodyPr/>
           <a:lstStyle/>
           <a:p>
-            <a:r>
-              <a:rPr lang="en-GB" dirty="0"/>
-              <a:t>"Section two had two jobs — show how each feature relates to popularity, and show how all features relate to each other. Scatterplot for the first, heatmap for the second. Two different questions, two different charts."</a:t>
-            </a:r>
             <a:endParaRPr lang="en-US" dirty="0"/>
           </a:p>
         </p:txBody>
@@ -2577,10 +2159,6 @@
           <a:bodyPr/>
           <a:lstStyle/>
           <a:p>
-            <a:r>
-              <a:rPr lang="en-GB" dirty="0"/>
-              <a:t>"For the genre profiles we needed to compare six genres across six features at once. The radar chart was the right call because each axis is one feature, so you see the whole shape of a genre in one glance. A bar chart would've needed six separate charts to do the same."</a:t>
-            </a:r>
             <a:endParaRPr lang="en-US" dirty="0"/>
           </a:p>
         </p:txBody>
@@ -2758,7 +2336,7 @@
           <a:p>
             <a:fld id="{C764DE79-268F-4C1A-8933-263129D2AF90}" type="datetimeFigureOut">
               <a:rPr lang="en-US" smtClean="0"/>
-              <a:t>5/28/2026</a:t>
+              <a:t>5/29/2026</a:t>
             </a:fld>
             <a:endParaRPr lang="en-US" dirty="0"/>
           </a:p>
@@ -2929,7 +2507,7 @@
           <a:p>
             <a:fld id="{C764DE79-268F-4C1A-8933-263129D2AF90}" type="datetimeFigureOut">
               <a:rPr lang="en-US" smtClean="0"/>
-              <a:t>5/28/2026</a:t>
+              <a:t>5/29/2026</a:t>
             </a:fld>
             <a:endParaRPr lang="en-US" dirty="0"/>
           </a:p>
@@ -3110,7 +2688,7 @@
           <a:p>
             <a:fld id="{C764DE79-268F-4C1A-8933-263129D2AF90}" type="datetimeFigureOut">
               <a:rPr lang="en-US" smtClean="0"/>
-              <a:t>5/28/2026</a:t>
+              <a:t>5/29/2026</a:t>
             </a:fld>
             <a:endParaRPr lang="en-US" dirty="0"/>
           </a:p>
@@ -3311,7 +2889,7 @@
           <a:p>
             <a:fld id="{C764DE79-268F-4C1A-8933-263129D2AF90}" type="datetimeFigureOut">
               <a:rPr lang="en-US" smtClean="0"/>
-              <a:t>5/28/2026</a:t>
+              <a:t>5/29/2026</a:t>
             </a:fld>
             <a:endParaRPr lang="en-US" dirty="0"/>
           </a:p>
@@ -3558,7 +3136,7 @@
           <a:p>
             <a:fld id="{C764DE79-268F-4C1A-8933-263129D2AF90}" type="datetimeFigureOut">
               <a:rPr lang="en-US" smtClean="0"/>
-              <a:t>5/28/2026</a:t>
+              <a:t>5/29/2026</a:t>
             </a:fld>
             <a:endParaRPr lang="en-US" dirty="0"/>
           </a:p>
@@ -3791,7 +3369,7 @@
           <a:p>
             <a:fld id="{C764DE79-268F-4C1A-8933-263129D2AF90}" type="datetimeFigureOut">
               <a:rPr lang="en-US" smtClean="0"/>
-              <a:t>5/28/2026</a:t>
+              <a:t>5/29/2026</a:t>
             </a:fld>
             <a:endParaRPr lang="en-US" dirty="0"/>
           </a:p>
@@ -4159,7 +3737,7 @@
           <a:p>
             <a:fld id="{C764DE79-268F-4C1A-8933-263129D2AF90}" type="datetimeFigureOut">
               <a:rPr lang="en-US" smtClean="0"/>
-              <a:t>5/28/2026</a:t>
+              <a:t>5/29/2026</a:t>
             </a:fld>
             <a:endParaRPr lang="en-US" dirty="0"/>
           </a:p>
@@ -4278,7 +3856,7 @@
           <a:p>
             <a:fld id="{C764DE79-268F-4C1A-8933-263129D2AF90}" type="datetimeFigureOut">
               <a:rPr lang="en-US" smtClean="0"/>
-              <a:t>5/28/2026</a:t>
+              <a:t>5/29/2026</a:t>
             </a:fld>
             <a:endParaRPr lang="en-US" dirty="0"/>
           </a:p>
@@ -4374,7 +3952,7 @@
           <a:p>
             <a:fld id="{C764DE79-268F-4C1A-8933-263129D2AF90}" type="datetimeFigureOut">
               <a:rPr lang="en-US" smtClean="0"/>
-              <a:t>5/28/2026</a:t>
+              <a:t>5/29/2026</a:t>
             </a:fld>
             <a:endParaRPr lang="en-US" dirty="0"/>
           </a:p>
@@ -4652,7 +4230,7 @@
           <a:p>
             <a:fld id="{C764DE79-268F-4C1A-8933-263129D2AF90}" type="datetimeFigureOut">
               <a:rPr lang="en-US" smtClean="0"/>
-              <a:t>5/28/2026</a:t>
+              <a:t>5/29/2026</a:t>
             </a:fld>
             <a:endParaRPr lang="en-US" dirty="0"/>
           </a:p>
@@ -4910,7 +4488,7 @@
           <a:p>
             <a:fld id="{C764DE79-268F-4C1A-8933-263129D2AF90}" type="datetimeFigureOut">
               <a:rPr lang="en-US" smtClean="0"/>
-              <a:t>5/28/2026</a:t>
+              <a:t>5/29/2026</a:t>
             </a:fld>
             <a:endParaRPr lang="en-US" dirty="0"/>
           </a:p>
@@ -5127,7 +4705,7 @@
           <a:p>
             <a:fld id="{C764DE79-268F-4C1A-8933-263129D2AF90}" type="datetimeFigureOut">
               <a:rPr lang="en-US" smtClean="0"/>
-              <a:t>5/28/2026</a:t>
+              <a:t>5/29/2026</a:t>
             </a:fld>
             <a:endParaRPr lang="en-US" dirty="0"/>
           </a:p>

--- a/ad24-1-presentation.pptx
+++ b/ad24-1-presentation.pptx
@@ -2336,7 +2336,7 @@
           <a:p>
             <a:fld id="{C764DE79-268F-4C1A-8933-263129D2AF90}" type="datetimeFigureOut">
               <a:rPr lang="en-US" smtClean="0"/>
-              <a:t>5/29/2026</a:t>
+              <a:t>5/31/2026</a:t>
             </a:fld>
             <a:endParaRPr lang="en-US" dirty="0"/>
           </a:p>
@@ -2507,7 +2507,7 @@
           <a:p>
             <a:fld id="{C764DE79-268F-4C1A-8933-263129D2AF90}" type="datetimeFigureOut">
               <a:rPr lang="en-US" smtClean="0"/>
-              <a:t>5/29/2026</a:t>
+              <a:t>5/31/2026</a:t>
             </a:fld>
             <a:endParaRPr lang="en-US" dirty="0"/>
           </a:p>
@@ -2688,7 +2688,7 @@
           <a:p>
             <a:fld id="{C764DE79-268F-4C1A-8933-263129D2AF90}" type="datetimeFigureOut">
               <a:rPr lang="en-US" smtClean="0"/>
-              <a:t>5/29/2026</a:t>
+              <a:t>5/31/2026</a:t>
             </a:fld>
             <a:endParaRPr lang="en-US" dirty="0"/>
           </a:p>
@@ -2889,7 +2889,7 @@
           <a:p>
             <a:fld id="{C764DE79-268F-4C1A-8933-263129D2AF90}" type="datetimeFigureOut">
               <a:rPr lang="en-US" smtClean="0"/>
-              <a:t>5/29/2026</a:t>
+              <a:t>5/31/2026</a:t>
             </a:fld>
             <a:endParaRPr lang="en-US" dirty="0"/>
           </a:p>
@@ -3136,7 +3136,7 @@
           <a:p>
             <a:fld id="{C764DE79-268F-4C1A-8933-263129D2AF90}" type="datetimeFigureOut">
               <a:rPr lang="en-US" smtClean="0"/>
-              <a:t>5/29/2026</a:t>
+              <a:t>5/31/2026</a:t>
             </a:fld>
             <a:endParaRPr lang="en-US" dirty="0"/>
           </a:p>
@@ -3369,7 +3369,7 @@
           <a:p>
             <a:fld id="{C764DE79-268F-4C1A-8933-263129D2AF90}" type="datetimeFigureOut">
               <a:rPr lang="en-US" smtClean="0"/>
-              <a:t>5/29/2026</a:t>
+              <a:t>5/31/2026</a:t>
             </a:fld>
             <a:endParaRPr lang="en-US" dirty="0"/>
           </a:p>
@@ -3737,7 +3737,7 @@
           <a:p>
             <a:fld id="{C764DE79-268F-4C1A-8933-263129D2AF90}" type="datetimeFigureOut">
               <a:rPr lang="en-US" smtClean="0"/>
-              <a:t>5/29/2026</a:t>
+              <a:t>5/31/2026</a:t>
             </a:fld>
             <a:endParaRPr lang="en-US" dirty="0"/>
           </a:p>
@@ -3856,7 +3856,7 @@
           <a:p>
             <a:fld id="{C764DE79-268F-4C1A-8933-263129D2AF90}" type="datetimeFigureOut">
               <a:rPr lang="en-US" smtClean="0"/>
-              <a:t>5/29/2026</a:t>
+              <a:t>5/31/2026</a:t>
             </a:fld>
             <a:endParaRPr lang="en-US" dirty="0"/>
           </a:p>
@@ -3952,7 +3952,7 @@
           <a:p>
             <a:fld id="{C764DE79-268F-4C1A-8933-263129D2AF90}" type="datetimeFigureOut">
               <a:rPr lang="en-US" smtClean="0"/>
-              <a:t>5/29/2026</a:t>
+              <a:t>5/31/2026</a:t>
             </a:fld>
             <a:endParaRPr lang="en-US" dirty="0"/>
           </a:p>
@@ -4230,7 +4230,7 @@
           <a:p>
             <a:fld id="{C764DE79-268F-4C1A-8933-263129D2AF90}" type="datetimeFigureOut">
               <a:rPr lang="en-US" smtClean="0"/>
-              <a:t>5/29/2026</a:t>
+              <a:t>5/31/2026</a:t>
             </a:fld>
             <a:endParaRPr lang="en-US" dirty="0"/>
           </a:p>
@@ -4488,7 +4488,7 @@
           <a:p>
             <a:fld id="{C764DE79-268F-4C1A-8933-263129D2AF90}" type="datetimeFigureOut">
               <a:rPr lang="en-US" smtClean="0"/>
-              <a:t>5/29/2026</a:t>
+              <a:t>5/31/2026</a:t>
             </a:fld>
             <a:endParaRPr lang="en-US" dirty="0"/>
           </a:p>
@@ -4705,7 +4705,7 @@
           <a:p>
             <a:fld id="{C764DE79-268F-4C1A-8933-263129D2AF90}" type="datetimeFigureOut">
               <a:rPr lang="en-US" smtClean="0"/>
-              <a:t>5/29/2026</a:t>
+              <a:t>5/31/2026</a:t>
             </a:fld>
             <a:endParaRPr lang="en-US" dirty="0"/>
           </a:p>
@@ -6221,10 +6221,10 @@
       </p:sp>
       <p:pic>
         <p:nvPicPr>
-          <p:cNvPr id="7" name="Grafik 6">
+          <p:cNvPr id="8" name="Grafik 7">
             <a:extLst>
               <a:ext uri="{FF2B5EF4-FFF2-40B4-BE49-F238E27FC236}">
-                <a16:creationId xmlns:a16="http://schemas.microsoft.com/office/drawing/2014/main" id="{0DF390EF-F58E-918A-8D94-4D3B97C816CE}"/>
+                <a16:creationId xmlns:a16="http://schemas.microsoft.com/office/drawing/2014/main" id="{474FCA6C-3A28-091E-A209-55A197EEBEB3}"/>
               </a:ext>
             </a:extLst>
           </p:cNvPr>
@@ -6241,8 +6241,8 @@
         </p:blipFill>
         <p:spPr>
           <a:xfrm>
-            <a:off x="411481" y="1432091"/>
-            <a:ext cx="4361992" cy="3271494"/>
+            <a:off x="569783" y="1298448"/>
+            <a:ext cx="3999241" cy="3373273"/>
           </a:xfrm>
           <a:prstGeom prst="rect">
             <a:avLst/>
@@ -12394,36 +12394,6 @@
           </a:p>
         </p:txBody>
       </p:sp>
-      <p:pic>
-        <p:nvPicPr>
-          <p:cNvPr id="32" name="Grafik 31">
-            <a:extLst>
-              <a:ext uri="{FF2B5EF4-FFF2-40B4-BE49-F238E27FC236}">
-                <a16:creationId xmlns:a16="http://schemas.microsoft.com/office/drawing/2014/main" id="{2FE98949-574C-F6CC-2985-D9AA1961F960}"/>
-              </a:ext>
-            </a:extLst>
-          </p:cNvPr>
-          <p:cNvPicPr>
-            <a:picLocks noChangeAspect="1"/>
-          </p:cNvPicPr>
-          <p:nvPr/>
-        </p:nvPicPr>
-        <p:blipFill>
-          <a:blip r:embed="rId3"/>
-          <a:stretch>
-            <a:fillRect/>
-          </a:stretch>
-        </p:blipFill>
-        <p:spPr>
-          <a:xfrm>
-            <a:off x="292133" y="1665669"/>
-            <a:ext cx="4470995" cy="2489008"/>
-          </a:xfrm>
-          <a:prstGeom prst="rect">
-            <a:avLst/>
-          </a:prstGeom>
-        </p:spPr>
-      </p:pic>
       <p:sp>
         <p:nvSpPr>
           <p:cNvPr id="33" name="Shape 5">
@@ -12626,6 +12596,36 @@
           </a:p>
         </p:txBody>
       </p:sp>
+      <p:pic>
+        <p:nvPicPr>
+          <p:cNvPr id="7" name="Grafik 6">
+            <a:extLst>
+              <a:ext uri="{FF2B5EF4-FFF2-40B4-BE49-F238E27FC236}">
+                <a16:creationId xmlns:a16="http://schemas.microsoft.com/office/drawing/2014/main" id="{599599DD-B8EC-8909-DCA2-9401C7DF5C0D}"/>
+              </a:ext>
+            </a:extLst>
+          </p:cNvPr>
+          <p:cNvPicPr>
+            <a:picLocks noChangeAspect="1"/>
+          </p:cNvPicPr>
+          <p:nvPr/>
+        </p:nvPicPr>
+        <p:blipFill>
+          <a:blip r:embed="rId3"/>
+          <a:stretch>
+            <a:fillRect/>
+          </a:stretch>
+        </p:blipFill>
+        <p:spPr>
+          <a:xfrm>
+            <a:off x="536835" y="1391986"/>
+            <a:ext cx="4231342" cy="3168396"/>
+          </a:xfrm>
+          <a:prstGeom prst="rect">
+            <a:avLst/>
+          </a:prstGeom>
+        </p:spPr>
+      </p:pic>
     </p:spTree>
     <p:extLst>
       <p:ext uri="{BB962C8B-B14F-4D97-AF65-F5344CB8AC3E}">
@@ -13492,10 +13492,10 @@
       </p:sp>
       <p:pic>
         <p:nvPicPr>
-          <p:cNvPr id="7" name="Grafik 6">
+          <p:cNvPr id="8" name="Grafik 7">
             <a:extLst>
               <a:ext uri="{FF2B5EF4-FFF2-40B4-BE49-F238E27FC236}">
-                <a16:creationId xmlns:a16="http://schemas.microsoft.com/office/drawing/2014/main" id="{9BBFF401-BE3E-C10E-5E35-EC394525F253}"/>
+                <a16:creationId xmlns:a16="http://schemas.microsoft.com/office/drawing/2014/main" id="{86114617-6CC9-8939-3FC9-674885690343}"/>
               </a:ext>
             </a:extLst>
           </p:cNvPr>
@@ -13512,8 +13512,8 @@
         </p:blipFill>
         <p:spPr>
           <a:xfrm>
-            <a:off x="603503" y="1298448"/>
-            <a:ext cx="3465575" cy="3465575"/>
+            <a:off x="728660" y="1298448"/>
+            <a:ext cx="3618470" cy="3534156"/>
           </a:xfrm>
           <a:prstGeom prst="rect">
             <a:avLst/>

--- a/ad24-1-presentation.pptx
+++ b/ad24-1-presentation.pptx
@@ -2336,7 +2336,7 @@
           <a:p>
             <a:fld id="{C764DE79-268F-4C1A-8933-263129D2AF90}" type="datetimeFigureOut">
               <a:rPr lang="en-US" smtClean="0"/>
-              <a:t>5/31/2026</a:t>
+              <a:t>5/31/26</a:t>
             </a:fld>
             <a:endParaRPr lang="en-US" dirty="0"/>
           </a:p>
@@ -2378,7 +2378,7 @@
           <a:p>
             <a:fld id="{48F63A3B-78C7-47BE-AE5E-E10140E04643}" type="slidenum">
               <a:rPr lang="en-US" smtClean="0"/>
-              <a:t>‹Nr.›</a:t>
+              <a:t>‹#›</a:t>
             </a:fld>
             <a:endParaRPr lang="en-US" dirty="0"/>
           </a:p>
@@ -2507,7 +2507,7 @@
           <a:p>
             <a:fld id="{C764DE79-268F-4C1A-8933-263129D2AF90}" type="datetimeFigureOut">
               <a:rPr lang="en-US" smtClean="0"/>
-              <a:t>5/31/2026</a:t>
+              <a:t>5/31/26</a:t>
             </a:fld>
             <a:endParaRPr lang="en-US" dirty="0"/>
           </a:p>
@@ -2549,7 +2549,7 @@
           <a:p>
             <a:fld id="{48F63A3B-78C7-47BE-AE5E-E10140E04643}" type="slidenum">
               <a:rPr lang="en-US" smtClean="0"/>
-              <a:t>‹Nr.›</a:t>
+              <a:t>‹#›</a:t>
             </a:fld>
             <a:endParaRPr lang="en-US" dirty="0"/>
           </a:p>
@@ -2688,7 +2688,7 @@
           <a:p>
             <a:fld id="{C764DE79-268F-4C1A-8933-263129D2AF90}" type="datetimeFigureOut">
               <a:rPr lang="en-US" smtClean="0"/>
-              <a:t>5/31/2026</a:t>
+              <a:t>5/31/26</a:t>
             </a:fld>
             <a:endParaRPr lang="en-US" dirty="0"/>
           </a:p>
@@ -2730,7 +2730,7 @@
           <a:p>
             <a:fld id="{48F63A3B-78C7-47BE-AE5E-E10140E04643}" type="slidenum">
               <a:rPr lang="en-US" smtClean="0"/>
-              <a:t>‹Nr.›</a:t>
+              <a:t>‹#›</a:t>
             </a:fld>
             <a:endParaRPr lang="en-US" dirty="0"/>
           </a:p>
@@ -2889,7 +2889,7 @@
           <a:p>
             <a:fld id="{C764DE79-268F-4C1A-8933-263129D2AF90}" type="datetimeFigureOut">
               <a:rPr lang="en-US" smtClean="0"/>
-              <a:t>5/31/2026</a:t>
+              <a:t>5/31/26</a:t>
             </a:fld>
             <a:endParaRPr lang="en-US" dirty="0"/>
           </a:p>
@@ -2931,7 +2931,7 @@
           <a:p>
             <a:fld id="{48F63A3B-78C7-47BE-AE5E-E10140E04643}" type="slidenum">
               <a:rPr lang="en-US" smtClean="0"/>
-              <a:t>‹Nr.›</a:t>
+              <a:t>‹#›</a:t>
             </a:fld>
             <a:endParaRPr lang="en-US" dirty="0"/>
           </a:p>
@@ -3136,7 +3136,7 @@
           <a:p>
             <a:fld id="{C764DE79-268F-4C1A-8933-263129D2AF90}" type="datetimeFigureOut">
               <a:rPr lang="en-US" smtClean="0"/>
-              <a:t>5/31/2026</a:t>
+              <a:t>5/31/26</a:t>
             </a:fld>
             <a:endParaRPr lang="en-US" dirty="0"/>
           </a:p>
@@ -3178,7 +3178,7 @@
           <a:p>
             <a:fld id="{48F63A3B-78C7-47BE-AE5E-E10140E04643}" type="slidenum">
               <a:rPr lang="en-US" smtClean="0"/>
-              <a:t>‹Nr.›</a:t>
+              <a:t>‹#›</a:t>
             </a:fld>
             <a:endParaRPr lang="en-US" dirty="0"/>
           </a:p>
@@ -3369,7 +3369,7 @@
           <a:p>
             <a:fld id="{C764DE79-268F-4C1A-8933-263129D2AF90}" type="datetimeFigureOut">
               <a:rPr lang="en-US" smtClean="0"/>
-              <a:t>5/31/2026</a:t>
+              <a:t>5/31/26</a:t>
             </a:fld>
             <a:endParaRPr lang="en-US" dirty="0"/>
           </a:p>
@@ -3411,7 +3411,7 @@
           <a:p>
             <a:fld id="{48F63A3B-78C7-47BE-AE5E-E10140E04643}" type="slidenum">
               <a:rPr lang="en-US" smtClean="0"/>
-              <a:t>‹Nr.›</a:t>
+              <a:t>‹#›</a:t>
             </a:fld>
             <a:endParaRPr lang="en-US" dirty="0"/>
           </a:p>
@@ -3737,7 +3737,7 @@
           <a:p>
             <a:fld id="{C764DE79-268F-4C1A-8933-263129D2AF90}" type="datetimeFigureOut">
               <a:rPr lang="en-US" smtClean="0"/>
-              <a:t>5/31/2026</a:t>
+              <a:t>5/31/26</a:t>
             </a:fld>
             <a:endParaRPr lang="en-US" dirty="0"/>
           </a:p>
@@ -3779,7 +3779,7 @@
           <a:p>
             <a:fld id="{48F63A3B-78C7-47BE-AE5E-E10140E04643}" type="slidenum">
               <a:rPr lang="en-US" smtClean="0"/>
-              <a:t>‹Nr.›</a:t>
+              <a:t>‹#›</a:t>
             </a:fld>
             <a:endParaRPr lang="en-US" dirty="0"/>
           </a:p>
@@ -3856,7 +3856,7 @@
           <a:p>
             <a:fld id="{C764DE79-268F-4C1A-8933-263129D2AF90}" type="datetimeFigureOut">
               <a:rPr lang="en-US" smtClean="0"/>
-              <a:t>5/31/2026</a:t>
+              <a:t>5/31/26</a:t>
             </a:fld>
             <a:endParaRPr lang="en-US" dirty="0"/>
           </a:p>
@@ -3898,7 +3898,7 @@
           <a:p>
             <a:fld id="{48F63A3B-78C7-47BE-AE5E-E10140E04643}" type="slidenum">
               <a:rPr lang="en-US" smtClean="0"/>
-              <a:t>‹Nr.›</a:t>
+              <a:t>‹#›</a:t>
             </a:fld>
             <a:endParaRPr lang="en-US" dirty="0"/>
           </a:p>
@@ -3952,7 +3952,7 @@
           <a:p>
             <a:fld id="{C764DE79-268F-4C1A-8933-263129D2AF90}" type="datetimeFigureOut">
               <a:rPr lang="en-US" smtClean="0"/>
-              <a:t>5/31/2026</a:t>
+              <a:t>5/31/26</a:t>
             </a:fld>
             <a:endParaRPr lang="en-US" dirty="0"/>
           </a:p>
@@ -3994,7 +3994,7 @@
           <a:p>
             <a:fld id="{48F63A3B-78C7-47BE-AE5E-E10140E04643}" type="slidenum">
               <a:rPr lang="en-US" smtClean="0"/>
-              <a:t>‹Nr.›</a:t>
+              <a:t>‹#›</a:t>
             </a:fld>
             <a:endParaRPr lang="en-US" dirty="0"/>
           </a:p>
@@ -4230,7 +4230,7 @@
           <a:p>
             <a:fld id="{C764DE79-268F-4C1A-8933-263129D2AF90}" type="datetimeFigureOut">
               <a:rPr lang="en-US" smtClean="0"/>
-              <a:t>5/31/2026</a:t>
+              <a:t>5/31/26</a:t>
             </a:fld>
             <a:endParaRPr lang="en-US" dirty="0"/>
           </a:p>
@@ -4272,7 +4272,7 @@
           <a:p>
             <a:fld id="{48F63A3B-78C7-47BE-AE5E-E10140E04643}" type="slidenum">
               <a:rPr lang="en-US" smtClean="0"/>
-              <a:t>‹Nr.›</a:t>
+              <a:t>‹#›</a:t>
             </a:fld>
             <a:endParaRPr lang="en-US" dirty="0"/>
           </a:p>
@@ -4488,7 +4488,7 @@
           <a:p>
             <a:fld id="{C764DE79-268F-4C1A-8933-263129D2AF90}" type="datetimeFigureOut">
               <a:rPr lang="en-US" smtClean="0"/>
-              <a:t>5/31/2026</a:t>
+              <a:t>5/31/26</a:t>
             </a:fld>
             <a:endParaRPr lang="en-US" dirty="0"/>
           </a:p>
@@ -4530,7 +4530,7 @@
           <a:p>
             <a:fld id="{48F63A3B-78C7-47BE-AE5E-E10140E04643}" type="slidenum">
               <a:rPr lang="en-US" smtClean="0"/>
-              <a:t>‹Nr.›</a:t>
+              <a:t>‹#›</a:t>
             </a:fld>
             <a:endParaRPr lang="en-US" dirty="0"/>
           </a:p>
@@ -4705,7 +4705,7 @@
           <a:p>
             <a:fld id="{C764DE79-268F-4C1A-8933-263129D2AF90}" type="datetimeFigureOut">
               <a:rPr lang="en-US" smtClean="0"/>
-              <a:t>5/31/2026</a:t>
+              <a:t>5/31/26</a:t>
             </a:fld>
             <a:endParaRPr lang="en-US" dirty="0"/>
           </a:p>
@@ -4783,7 +4783,7 @@
           <a:p>
             <a:fld id="{48F63A3B-78C7-47BE-AE5E-E10140E04643}" type="slidenum">
               <a:rPr lang="en-US" smtClean="0"/>
-              <a:t>‹Nr.›</a:t>
+              <a:t>‹#›</a:t>
             </a:fld>
             <a:endParaRPr lang="en-US" dirty="0"/>
           </a:p>
@@ -6221,10 +6221,10 @@
       </p:sp>
       <p:pic>
         <p:nvPicPr>
-          <p:cNvPr id="8" name="Grafik 7">
+          <p:cNvPr id="6" name="Picture 5">
             <a:extLst>
               <a:ext uri="{FF2B5EF4-FFF2-40B4-BE49-F238E27FC236}">
-                <a16:creationId xmlns:a16="http://schemas.microsoft.com/office/drawing/2014/main" id="{474FCA6C-3A28-091E-A209-55A197EEBEB3}"/>
+                <a16:creationId xmlns:a16="http://schemas.microsoft.com/office/drawing/2014/main" id="{6EE97C50-7171-1505-81E1-7DB37489CC43}"/>
               </a:ext>
             </a:extLst>
           </p:cNvPr>
@@ -6241,8 +6241,8 @@
         </p:blipFill>
         <p:spPr>
           <a:xfrm>
-            <a:off x="569783" y="1298448"/>
-            <a:ext cx="3999241" cy="3373273"/>
+            <a:off x="1062808" y="1458835"/>
+            <a:ext cx="4377872" cy="3664375"/>
           </a:xfrm>
           <a:prstGeom prst="rect">
             <a:avLst/>
@@ -12840,8 +12840,8 @@
         </p:nvSpPr>
         <p:spPr>
           <a:xfrm>
-            <a:off x="5440680" y="1497236"/>
-            <a:ext cx="2899027" cy="2825874"/>
+            <a:off x="5440680" y="444674"/>
+            <a:ext cx="3169920" cy="1362355"/>
           </a:xfrm>
           <a:prstGeom prst="rect">
             <a:avLst/>
@@ -12878,7 +12878,7 @@
         </p:nvSpPr>
         <p:spPr>
           <a:xfrm>
-            <a:off x="5518593" y="1609344"/>
+            <a:off x="5703908" y="444674"/>
             <a:ext cx="1371600" cy="365760"/>
           </a:xfrm>
           <a:prstGeom prst="rect">
@@ -12920,7 +12920,7 @@
         </p:nvSpPr>
         <p:spPr>
           <a:xfrm>
-            <a:off x="5625995" y="2091596"/>
+            <a:off x="5798898" y="900779"/>
             <a:ext cx="822960" cy="384048"/>
           </a:xfrm>
           <a:prstGeom prst="rect">
@@ -12958,7 +12958,7 @@
         </p:nvSpPr>
         <p:spPr>
           <a:xfrm>
-            <a:off x="5625995" y="2091596"/>
+            <a:off x="5802994" y="877824"/>
             <a:ext cx="822960" cy="384048"/>
           </a:xfrm>
           <a:prstGeom prst="rect">
@@ -13000,7 +13000,7 @@
         </p:nvSpPr>
         <p:spPr>
           <a:xfrm>
-            <a:off x="5518593" y="2592136"/>
+            <a:off x="5647129" y="1310503"/>
             <a:ext cx="1949458" cy="384048"/>
           </a:xfrm>
           <a:prstGeom prst="rect">
@@ -13030,10 +13030,10 @@
       </p:sp>
       <p:pic>
         <p:nvPicPr>
-          <p:cNvPr id="7" name="Grafik 6">
+          <p:cNvPr id="6" name="Picture 5">
             <a:extLst>
               <a:ext uri="{FF2B5EF4-FFF2-40B4-BE49-F238E27FC236}">
-                <a16:creationId xmlns:a16="http://schemas.microsoft.com/office/drawing/2014/main" id="{AE6A817A-B990-AFFD-E129-22F8A76572C6}"/>
+                <a16:creationId xmlns:a16="http://schemas.microsoft.com/office/drawing/2014/main" id="{13BE5333-9B4A-230E-E797-DE7E0C95C755}"/>
               </a:ext>
             </a:extLst>
           </p:cNvPr>
@@ -13050,8 +13050,8 @@
         </p:blipFill>
         <p:spPr>
           <a:xfrm>
-            <a:off x="262416" y="1352416"/>
-            <a:ext cx="2473218" cy="1796583"/>
+            <a:off x="457199" y="1683421"/>
+            <a:ext cx="3297977" cy="2474921"/>
           </a:xfrm>
           <a:prstGeom prst="rect">
             <a:avLst/>
@@ -13060,10 +13060,10 @@
       </p:pic>
       <p:pic>
         <p:nvPicPr>
-          <p:cNvPr id="11" name="Grafik 10">
+          <p:cNvPr id="9" name="Picture 8">
             <a:extLst>
               <a:ext uri="{FF2B5EF4-FFF2-40B4-BE49-F238E27FC236}">
-                <a16:creationId xmlns:a16="http://schemas.microsoft.com/office/drawing/2014/main" id="{FB2E401A-F331-DB3F-9C83-F5FCB342FD72}"/>
+                <a16:creationId xmlns:a16="http://schemas.microsoft.com/office/drawing/2014/main" id="{6A24B615-CED2-AD1F-4ECB-B6E4CA60896B}"/>
               </a:ext>
             </a:extLst>
           </p:cNvPr>
@@ -13080,8 +13080,8 @@
         </p:blipFill>
         <p:spPr>
           <a:xfrm>
-            <a:off x="2378198" y="2910173"/>
-            <a:ext cx="2899027" cy="2029729"/>
+            <a:off x="4697560" y="2229091"/>
+            <a:ext cx="3600540" cy="2469735"/>
           </a:xfrm>
           <a:prstGeom prst="rect">
             <a:avLst/>
@@ -13492,10 +13492,10 @@
       </p:sp>
       <p:pic>
         <p:nvPicPr>
-          <p:cNvPr id="8" name="Grafik 7">
+          <p:cNvPr id="6" name="Picture 5">
             <a:extLst>
               <a:ext uri="{FF2B5EF4-FFF2-40B4-BE49-F238E27FC236}">
-                <a16:creationId xmlns:a16="http://schemas.microsoft.com/office/drawing/2014/main" id="{86114617-6CC9-8939-3FC9-674885690343}"/>
+                <a16:creationId xmlns:a16="http://schemas.microsoft.com/office/drawing/2014/main" id="{B6A8BE0D-0A56-587C-4EAE-A3FAD044278F}"/>
               </a:ext>
             </a:extLst>
           </p:cNvPr>
@@ -13506,14 +13506,15 @@
         </p:nvPicPr>
         <p:blipFill>
           <a:blip r:embed="rId3"/>
+          <a:srcRect r="598"/>
           <a:stretch>
             <a:fillRect/>
           </a:stretch>
         </p:blipFill>
         <p:spPr>
           <a:xfrm>
-            <a:off x="728660" y="1298448"/>
-            <a:ext cx="3618470" cy="3534156"/>
+            <a:off x="603504" y="1497236"/>
+            <a:ext cx="3964577" cy="3878945"/>
           </a:xfrm>
           <a:prstGeom prst="rect">
             <a:avLst/>

--- a/ad24-1-presentation.pptx
+++ b/ad24-1-presentation.pptx
@@ -5786,10 +5786,10 @@
       </p:sp>
       <p:pic>
         <p:nvPicPr>
-          <p:cNvPr id="8" name="Grafik 7">
+          <p:cNvPr id="6" name="Picture 5">
             <a:extLst>
               <a:ext uri="{FF2B5EF4-FFF2-40B4-BE49-F238E27FC236}">
-                <a16:creationId xmlns:a16="http://schemas.microsoft.com/office/drawing/2014/main" id="{6DC975C0-FBBE-A17F-90C7-8B4E21DF92E6}"/>
+                <a16:creationId xmlns:a16="http://schemas.microsoft.com/office/drawing/2014/main" id="{FDD11D58-4FF6-06E0-E498-64AFC73BC44B}"/>
               </a:ext>
             </a:extLst>
           </p:cNvPr>
@@ -5806,8 +5806,8 @@
         </p:blipFill>
         <p:spPr>
           <a:xfrm>
-            <a:off x="917375" y="1244243"/>
-            <a:ext cx="3562643" cy="3554396"/>
+            <a:off x="2205886" y="1188720"/>
+            <a:ext cx="3234794" cy="3698748"/>
           </a:xfrm>
           <a:prstGeom prst="rect">
             <a:avLst/>
@@ -13302,8 +13302,8 @@
         </p:nvSpPr>
         <p:spPr>
           <a:xfrm>
-            <a:off x="5440680" y="1497236"/>
-            <a:ext cx="2899027" cy="2825874"/>
+            <a:off x="5180918" y="202696"/>
+            <a:ext cx="3503078" cy="1860656"/>
           </a:xfrm>
           <a:prstGeom prst="rect">
             <a:avLst/>
@@ -13322,7 +13322,7 @@
           <a:bodyPr/>
           <a:lstStyle/>
           <a:p>
-            <a:endParaRPr lang="de-CH"/>
+            <a:endParaRPr lang="de-CH" dirty="0"/>
           </a:p>
         </p:txBody>
       </p:sp>
@@ -13340,7 +13340,7 @@
         </p:nvSpPr>
         <p:spPr>
           <a:xfrm>
-            <a:off x="5518593" y="1609344"/>
+            <a:off x="5257800" y="320040"/>
             <a:ext cx="1371600" cy="365760"/>
           </a:xfrm>
           <a:prstGeom prst="rect">
@@ -13382,7 +13382,7 @@
         </p:nvSpPr>
         <p:spPr>
           <a:xfrm>
-            <a:off x="5625995" y="2091596"/>
+            <a:off x="6997731" y="804672"/>
             <a:ext cx="822960" cy="384048"/>
           </a:xfrm>
           <a:prstGeom prst="rect">
@@ -13402,49 +13402,7 @@
           <a:bodyPr/>
           <a:lstStyle/>
           <a:p>
-            <a:endParaRPr lang="de-CH"/>
-          </a:p>
-        </p:txBody>
-      </p:sp>
-      <p:sp>
-        <p:nvSpPr>
-          <p:cNvPr id="36" name="Text 8">
-            <a:extLst>
-              <a:ext uri="{FF2B5EF4-FFF2-40B4-BE49-F238E27FC236}">
-                <a16:creationId xmlns:a16="http://schemas.microsoft.com/office/drawing/2014/main" id="{7069328F-9A68-AF27-98FF-E2384606B736}"/>
-              </a:ext>
-            </a:extLst>
-          </p:cNvPr>
-          <p:cNvSpPr/>
-          <p:nvPr/>
-        </p:nvSpPr>
-        <p:spPr>
-          <a:xfrm>
-            <a:off x="5625995" y="2091596"/>
-            <a:ext cx="822960" cy="384048"/>
-          </a:xfrm>
-          <a:prstGeom prst="rect">
-            <a:avLst/>
-          </a:prstGeom>
-          <a:noFill/>
-          <a:ln/>
-        </p:spPr>
-        <p:txBody>
-          <a:bodyPr wrap="square" lIns="0" tIns="0" rIns="0" bIns="0" rtlCol="0" anchor="ctr"/>
-          <a:lstStyle/>
-          <a:p>
-            <a:pPr marL="0" indent="0" algn="ctr">
-              <a:buNone/>
-            </a:pPr>
-            <a:r>
-              <a:rPr lang="en-US" sz="1100" dirty="0" err="1">
-                <a:solidFill>
-                  <a:srgbClr val="00E676"/>
-                </a:solidFill>
-              </a:rPr>
-              <a:t>Radarchart</a:t>
-            </a:r>
-            <a:endParaRPr lang="en-US" sz="1100" dirty="0"/>
+            <a:endParaRPr lang="de-CH" sz="1100" dirty="0"/>
           </a:p>
         </p:txBody>
       </p:sp>
@@ -13462,8 +13420,8 @@
         </p:nvSpPr>
         <p:spPr>
           <a:xfrm>
-            <a:off x="5518593" y="2592135"/>
-            <a:ext cx="1949458" cy="475703"/>
+            <a:off x="5341524" y="1155174"/>
+            <a:ext cx="1628778" cy="732088"/>
           </a:xfrm>
           <a:prstGeom prst="rect">
             <a:avLst/>
@@ -13487,6 +13445,44 @@
               <a:t>Multiple continuous variables for comparison</a:t>
             </a:r>
             <a:endParaRPr lang="en-US" sz="1300" dirty="0"/>
+          </a:p>
+        </p:txBody>
+      </p:sp>
+      <p:sp>
+        <p:nvSpPr>
+          <p:cNvPr id="11" name="Shape 7">
+            <a:extLst>
+              <a:ext uri="{FF2B5EF4-FFF2-40B4-BE49-F238E27FC236}">
+                <a16:creationId xmlns:a16="http://schemas.microsoft.com/office/drawing/2014/main" id="{3ED0DE9C-A4F6-AAAF-3C27-7CA9F096F5FF}"/>
+              </a:ext>
+            </a:extLst>
+          </p:cNvPr>
+          <p:cNvSpPr/>
+          <p:nvPr/>
+        </p:nvSpPr>
+        <p:spPr>
+          <a:xfrm>
+            <a:off x="5338437" y="733319"/>
+            <a:ext cx="822960" cy="384048"/>
+          </a:xfrm>
+          <a:prstGeom prst="rect">
+            <a:avLst/>
+          </a:prstGeom>
+          <a:solidFill>
+            <a:srgbClr val="111122"/>
+          </a:solidFill>
+          <a:ln w="6350">
+            <a:solidFill>
+              <a:srgbClr val="00E676"/>
+            </a:solidFill>
+            <a:prstDash val="solid"/>
+          </a:ln>
+        </p:spPr>
+        <p:txBody>
+          <a:bodyPr/>
+          <a:lstStyle/>
+          <a:p>
+            <a:endParaRPr lang="de-CH" dirty="0"/>
           </a:p>
         </p:txBody>
       </p:sp>
@@ -13513,7 +13509,7 @@
         </p:blipFill>
         <p:spPr>
           <a:xfrm>
-            <a:off x="603504" y="1497236"/>
+            <a:off x="211619" y="1434606"/>
             <a:ext cx="3964577" cy="3878945"/>
           </a:xfrm>
           <a:prstGeom prst="rect">
@@ -13521,6 +13517,152 @@
           </a:prstGeom>
         </p:spPr>
       </p:pic>
+      <p:pic>
+        <p:nvPicPr>
+          <p:cNvPr id="7" name="Picture 6">
+            <a:extLst>
+              <a:ext uri="{FF2B5EF4-FFF2-40B4-BE49-F238E27FC236}">
+                <a16:creationId xmlns:a16="http://schemas.microsoft.com/office/drawing/2014/main" id="{A61DB9FB-74B2-A4A9-42CB-1C53FA5CB40E}"/>
+              </a:ext>
+            </a:extLst>
+          </p:cNvPr>
+          <p:cNvPicPr>
+            <a:picLocks noChangeAspect="1"/>
+          </p:cNvPicPr>
+          <p:nvPr/>
+        </p:nvPicPr>
+        <p:blipFill>
+          <a:blip r:embed="rId4"/>
+          <a:stretch>
+            <a:fillRect/>
+          </a:stretch>
+        </p:blipFill>
+        <p:spPr>
+          <a:xfrm>
+            <a:off x="4572000" y="2616772"/>
+            <a:ext cx="4114800" cy="2136386"/>
+          </a:xfrm>
+          <a:prstGeom prst="rect">
+            <a:avLst/>
+          </a:prstGeom>
+        </p:spPr>
+      </p:pic>
+      <p:sp>
+        <p:nvSpPr>
+          <p:cNvPr id="14" name="TextBox 13">
+            <a:extLst>
+              <a:ext uri="{FF2B5EF4-FFF2-40B4-BE49-F238E27FC236}">
+                <a16:creationId xmlns:a16="http://schemas.microsoft.com/office/drawing/2014/main" id="{DA4EF911-2060-7EA7-368D-BDA166085A88}"/>
+              </a:ext>
+            </a:extLst>
+          </p:cNvPr>
+          <p:cNvSpPr txBox="1"/>
+          <p:nvPr/>
+        </p:nvSpPr>
+        <p:spPr>
+          <a:xfrm>
+            <a:off x="6932456" y="1240456"/>
+            <a:ext cx="1751539" cy="692497"/>
+          </a:xfrm>
+          <a:prstGeom prst="rect">
+            <a:avLst/>
+          </a:prstGeom>
+          <a:noFill/>
+        </p:spPr>
+        <p:txBody>
+          <a:bodyPr wrap="square" rtlCol="0">
+            <a:spAutoFit/>
+          </a:bodyPr>
+          <a:lstStyle/>
+          <a:p>
+            <a:r>
+              <a:rPr lang="en-US" sz="1300" dirty="0"/>
+              <a:t>One variable to shows how consistent each genre is</a:t>
+            </a:r>
+          </a:p>
+        </p:txBody>
+      </p:sp>
+      <p:sp>
+        <p:nvSpPr>
+          <p:cNvPr id="36" name="Text 8">
+            <a:extLst>
+              <a:ext uri="{FF2B5EF4-FFF2-40B4-BE49-F238E27FC236}">
+                <a16:creationId xmlns:a16="http://schemas.microsoft.com/office/drawing/2014/main" id="{7069328F-9A68-AF27-98FF-E2384606B736}"/>
+              </a:ext>
+            </a:extLst>
+          </p:cNvPr>
+          <p:cNvSpPr/>
+          <p:nvPr/>
+        </p:nvSpPr>
+        <p:spPr>
+          <a:xfrm>
+            <a:off x="5332953" y="748976"/>
+            <a:ext cx="822960" cy="384048"/>
+          </a:xfrm>
+          <a:prstGeom prst="rect">
+            <a:avLst/>
+          </a:prstGeom>
+          <a:noFill/>
+          <a:ln/>
+        </p:spPr>
+        <p:txBody>
+          <a:bodyPr wrap="square" lIns="0" tIns="0" rIns="0" bIns="0" rtlCol="0" anchor="ctr"/>
+          <a:lstStyle/>
+          <a:p>
+            <a:pPr marL="0" indent="0" algn="ctr">
+              <a:buNone/>
+            </a:pPr>
+            <a:r>
+              <a:rPr lang="en-US" sz="1100" dirty="0" err="1">
+                <a:solidFill>
+                  <a:srgbClr val="00E676"/>
+                </a:solidFill>
+              </a:rPr>
+              <a:t>Radarchart</a:t>
+            </a:r>
+            <a:endParaRPr lang="en-US" sz="1100" dirty="0"/>
+          </a:p>
+        </p:txBody>
+      </p:sp>
+      <p:sp>
+        <p:nvSpPr>
+          <p:cNvPr id="15" name="TextBox 14">
+            <a:extLst>
+              <a:ext uri="{FF2B5EF4-FFF2-40B4-BE49-F238E27FC236}">
+                <a16:creationId xmlns:a16="http://schemas.microsoft.com/office/drawing/2014/main" id="{0A9A4F41-8EFD-CD88-F038-B7D693DBC4D9}"/>
+              </a:ext>
+            </a:extLst>
+          </p:cNvPr>
+          <p:cNvSpPr txBox="1"/>
+          <p:nvPr/>
+        </p:nvSpPr>
+        <p:spPr>
+          <a:xfrm>
+            <a:off x="6997731" y="875731"/>
+            <a:ext cx="954020" cy="261610"/>
+          </a:xfrm>
+          <a:prstGeom prst="rect">
+            <a:avLst/>
+          </a:prstGeom>
+          <a:noFill/>
+        </p:spPr>
+        <p:txBody>
+          <a:bodyPr wrap="square" rtlCol="0">
+            <a:spAutoFit/>
+          </a:bodyPr>
+          <a:lstStyle/>
+          <a:p>
+            <a:r>
+              <a:rPr lang="en-US" sz="1100" dirty="0">
+                <a:solidFill>
+                  <a:srgbClr val="1DB954"/>
+                </a:solidFill>
+              </a:rPr>
+              <a:t>Range plot</a:t>
+            </a:r>
+          </a:p>
+        </p:txBody>
+      </p:sp>
     </p:spTree>
     <p:extLst>
       <p:ext uri="{BB962C8B-B14F-4D97-AF65-F5344CB8AC3E}">
